--- a/presentation/unit-1/CLMS-Unit-1-SE-Fundamentals-and-Design.pptx
+++ b/presentation/unit-1/CLMS-Unit-1-SE-Fundamentals-and-Design.pptx
@@ -9334,7 +9334,7 @@
                 <a:latin typeface="Menlo"/>
                 <a:ea typeface="Menlo"/>
               </a:rPr>
-              <a:t>JsonStore</a:t>
+              <a:t>BinaryStore</a:t>
             </a:r>
           </a:p>
         </p:txBody>
@@ -9374,7 +9374,7 @@
                 <a:latin typeface="Helvetica"/>
                 <a:ea typeface="Helvetica"/>
               </a:rPr>
-              <a:t>L5 · JSONSTORE</a:t>
+              <a:t>L5 · BINARYSTORE</a:t>
             </a:r>
           </a:p>
         </p:txBody>
@@ -9414,7 +9414,7 @@
                 <a:latin typeface="Helvetica"/>
                 <a:ea typeface="Helvetica"/>
               </a:rPr>
-              <a:t>tmp file + atomic rename · crash-safe</a:t>
+              <a:t>.cdb container · tmp+rename · CRC32-checked</a:t>
             </a:r>
           </a:p>
         </p:txBody>
@@ -9499,7 +9499,7 @@
                 <a:latin typeface="Helvetica"/>
                 <a:ea typeface="Helvetica"/>
               </a:rPr>
-              <a:t>JSON files instead of Postgres — an explicit requirement, answered with atomic persistence</a:t>
+              <a:t>Binary .cdb files in local storage instead of Postgres — atomic, CRC32-guarded persistence</a:t>
             </a:r>
           </a:p>
         </p:txBody>
@@ -9539,7 +9539,7 @@
                 <a:latin typeface="Menlo"/>
                 <a:ea typeface="Menlo"/>
               </a:rPr>
-              <a:t>System scale: 29 source files · 1,498 LOC · 314 functions · ~45 REST endpoints</a:t>
+              <a:t>System scale: 29 source files · 1,585 LOC · 321 functions · ~45 REST endpoints</a:t>
             </a:r>
           </a:p>
         </p:txBody>
@@ -14693,7 +14693,7 @@
                 <a:latin typeface="Helvetica"/>
                 <a:ea typeface="Helvetica"/>
               </a:rPr>
-              <a:t>Layered backend · JsonStore · barcodes · data · principles</a:t>
+              <a:t>Layered backend · binary store · barcodes · data · principles</a:t>
             </a:r>
           </a:p>
         </p:txBody>
@@ -18918,7 +18918,7 @@
                           <a:latin typeface="Helvetica"/>
                           <a:ea typeface="Helvetica"/>
                         </a:rPr>
-                        <a:t>Five strict layers · avg CC 2.13</a:t>
+                        <a:t>Five strict layers · avg CC 2.15</a:t>
                       </a:r>
                     </a:p>
                   </a:txBody>
@@ -23818,7 +23818,7 @@
                 <a:latin typeface="Helvetica"/>
                 <a:ea typeface="Helvetica"/>
               </a:rPr>
-              <a:t>Copy owns the state machine of the next slide. Loan and Reservation reference Member, Title and Copy by id — JsonStore persists one collection per entity, and joins happen in the domain layer.</a:t>
+              <a:t>Copy owns the state machine of the next slide. Loan and Reservation reference Member, Title and Copy by id — BinaryStore persists each collection as one opaque .cdb binary file, and joins happen in the domain layer.</a:t>
             </a:r>
           </a:p>
         </p:txBody>

--- a/presentation/unit-1/CLMS-Unit-1-SE-Fundamentals-and-Design.pptx
+++ b/presentation/unit-1/CLMS-Unit-1-SE-Fundamentals-and-Design.pptx
@@ -3511,7 +3511,7 @@
                 <a:latin typeface="Helvetica"/>
                 <a:ea typeface="Helvetica"/>
               </a:rPr>
-              <a:t>How CLMS was framed, specified and designed before the first sprint opened.</a:t>
+              <a:t>How KCT Library was framed, specified and designed before the first sprint opened.</a:t>
             </a:r>
           </a:p>
         </p:txBody>
@@ -6227,7 +6227,7 @@
                 <a:latin typeface="Helvetica"/>
                 <a:ea typeface="Helvetica"/>
               </a:rPr>
-              <a:t>CLMS · 24CSI015 · Software Engineering with Agile Practices</a:t>
+              <a:t>KCT Library · 24CSI015 · Software Engineering with Agile Practices</a:t>
             </a:r>
           </a:p>
         </p:txBody>
@@ -7918,7 +7918,7 @@
                 <a:latin typeface="Helvetica"/>
                 <a:ea typeface="Helvetica"/>
               </a:rPr>
-              <a:t>CLMS · 24CSI015 · Software Engineering with Agile Practices</a:t>
+              <a:t>KCT Library · 24CSI015 · Software Engineering with Agile Practices</a:t>
             </a:r>
           </a:p>
         </p:txBody>
@@ -9624,7 +9624,7 @@
                 <a:latin typeface="Helvetica"/>
                 <a:ea typeface="Helvetica"/>
               </a:rPr>
-              <a:t>CLMS · 24CSI015 · Software Engineering with Agile Practices</a:t>
+              <a:t>KCT Library · 24CSI015 · Software Engineering with Agile Practices</a:t>
             </a:r>
           </a:p>
         </p:txBody>
@@ -10774,7 +10774,7 @@
                 <a:latin typeface="Helvetica"/>
                 <a:ea typeface="Helvetica"/>
               </a:rPr>
-              <a:t>CLMS · 24CSI015 · Software Engineering with Agile Practices</a:t>
+              <a:t>KCT Library · 24CSI015 · Software Engineering with Agile Practices</a:t>
             </a:r>
           </a:p>
         </p:txBody>
@@ -11995,7 +11995,7 @@
                 <a:latin typeface="Helvetica"/>
                 <a:ea typeface="Helvetica"/>
               </a:rPr>
-              <a:t>CLMS · 24CSI015 · Software Engineering with Agile Practices</a:t>
+              <a:t>KCT Library · 24CSI015 · Software Engineering with Agile Practices</a:t>
             </a:r>
           </a:p>
         </p:txBody>
@@ -12966,7 +12966,7 @@
                 <a:latin typeface="Helvetica"/>
                 <a:ea typeface="Helvetica"/>
               </a:rPr>
-              <a:t>CLMS · 24CSI015 · Software Engineering with Agile Practices</a:t>
+              <a:t>KCT Library · 24CSI015 · Software Engineering with Agile Practices</a:t>
             </a:r>
           </a:p>
         </p:txBody>
@@ -13807,7 +13807,7 @@
                 <a:latin typeface="Helvetica"/>
                 <a:ea typeface="Helvetica"/>
               </a:rPr>
-              <a:t>CLMS · 24CSI015 · Software Engineering with Agile Practices</a:t>
+              <a:t>KCT Library · 24CSI015 · Software Engineering with Agile Practices</a:t>
             </a:r>
           </a:p>
         </p:txBody>
@@ -14778,7 +14778,7 @@
                 <a:latin typeface="Helvetica"/>
                 <a:ea typeface="Helvetica"/>
               </a:rPr>
-              <a:t>CLMS · 24CSI015 · Software Engineering with Agile Practices</a:t>
+              <a:t>KCT Library · 24CSI015 · Software Engineering with Agile Practices</a:t>
             </a:r>
           </a:p>
         </p:txBody>
@@ -15619,7 +15619,7 @@
                 <a:latin typeface="Helvetica"/>
                 <a:ea typeface="Helvetica"/>
               </a:rPr>
-              <a:t>CLMS ANSWERS</a:t>
+              <a:t>KCT LIBRARY ANSWERS</a:t>
             </a:r>
           </a:p>
         </p:txBody>
@@ -16314,7 +16314,7 @@
                 <a:latin typeface="Helvetica"/>
                 <a:ea typeface="Helvetica"/>
               </a:rPr>
-              <a:t>CLMS · 24CSI015 · Software Engineering with Agile Practices</a:t>
+              <a:t>KCT Library · 24CSI015 · Software Engineering with Agile Practices</a:t>
             </a:r>
           </a:p>
         </p:txBody>
@@ -17147,7 +17147,7 @@
                 <a:latin typeface="Helvetica"/>
                 <a:ea typeface="Helvetica"/>
               </a:rPr>
-              <a:t>CLMS · 24CSI015 · Software Engineering with Agile Practices</a:t>
+              <a:t>KCT Library · 24CSI015 · Software Engineering with Agile Practices</a:t>
             </a:r>
           </a:p>
         </p:txBody>
@@ -17464,7 +17464,7 @@
                           <a:latin typeface="Helvetica"/>
                           <a:ea typeface="Helvetica"/>
                         </a:rPr>
-                        <a:t>HOW CLMS ACTUALLY RAN</a:t>
+                        <a:t>HOW KCT Library ACTUALLY RAN</a:t>
                       </a:r>
                     </a:p>
                   </a:txBody>
@@ -17712,7 +17712,7 @@
                           <a:latin typeface="Menlo"/>
                           <a:ea typeface="Menlo"/>
                         </a:rPr>
-                        <a:t>Fit for CLMS</a:t>
+                        <a:t>Fit for KCT Library</a:t>
                       </a:r>
                     </a:p>
                   </a:txBody>
@@ -17980,7 +17980,7 @@
                 <a:latin typeface="Helvetica"/>
                 <a:ea typeface="Helvetica"/>
               </a:rPr>
-              <a:t>CLMS · 24CSI015 · Software Engineering with Agile Practices</a:t>
+              <a:t>KCT Library · 24CSI015 · Software Engineering with Agile Practices</a:t>
             </a:r>
           </a:p>
         </p:txBody>
@@ -19053,7 +19053,7 @@
                 <a:latin typeface="Helvetica"/>
                 <a:ea typeface="Helvetica"/>
               </a:rPr>
-              <a:t>CLMS · 24CSI015 · Software Engineering with Agile Practices</a:t>
+              <a:t>KCT Library · 24CSI015 · Software Engineering with Agile Practices</a:t>
             </a:r>
           </a:p>
         </p:txBody>
@@ -20874,7 +20874,7 @@
                 <a:latin typeface="Helvetica"/>
                 <a:ea typeface="Helvetica"/>
               </a:rPr>
-              <a:t>CLMS · 24CSI015 · Software Engineering with Agile Practices</a:t>
+              <a:t>KCT Library · 24CSI015 · Software Engineering with Agile Practices</a:t>
             </a:r>
           </a:p>
         </p:txBody>
@@ -21185,7 +21185,7 @@
                 <a:latin typeface="Helvetica"/>
                 <a:ea typeface="Helvetica"/>
               </a:rPr>
-              <a:t>CLMS · COLLEGE LIBRARY MANAGEMENT SYSTEM</a:t>
+              <a:t>KCT Library · COLLEGE LIBRARY MANAGEMENT SYSTEM</a:t>
             </a:r>
           </a:p>
         </p:txBody>
@@ -23000,7 +23000,7 @@
                 <a:latin typeface="Helvetica"/>
                 <a:ea typeface="Helvetica"/>
               </a:rPr>
-              <a:t>CLMS · 24CSI015 · Software Engineering with Agile Practices</a:t>
+              <a:t>KCT Library · 24CSI015 · Software Engineering with Agile Practices</a:t>
             </a:r>
           </a:p>
         </p:txBody>
@@ -23988,7 +23988,7 @@
                 <a:latin typeface="Helvetica"/>
                 <a:ea typeface="Helvetica"/>
               </a:rPr>
-              <a:t>CLMS · 24CSI015 · Software Engineering with Agile Practices</a:t>
+              <a:t>KCT Library · 24CSI015 · Software Engineering with Agile Practices</a:t>
             </a:r>
           </a:p>
         </p:txBody>

--- a/presentation/unit-1/CLMS-Unit-1-SE-Fundamentals-and-Design.pptx
+++ b/presentation/unit-1/CLMS-Unit-1-SE-Fundamentals-and-Design.pptx
@@ -3306,7 +3306,7 @@
                 <a:latin typeface="Helvetica"/>
                 <a:ea typeface="Helvetica"/>
               </a:rPr>
-              <a:t>COURSE 24CSI015 · SOFTWARE ENGINEERING WITH AGILE PRACTICES</a:t>
+              <a:t>KCT LIBRARY — SYSTEM DOCUMENTATION</a:t>
             </a:r>
           </a:p>
         </p:txBody>
@@ -3636,7 +3636,7 @@
                 <a:latin typeface="Helvetica"/>
                 <a:ea typeface="Helvetica"/>
               </a:rPr>
-              <a:t>S. Nidhish Guhan S</a:t>
+              <a:t>Library Administration</a:t>
             </a:r>
           </a:p>
         </p:txBody>
@@ -3676,7 +3676,7 @@
                 <a:latin typeface="Helvetica"/>
                 <a:ea typeface="Helvetica"/>
               </a:rPr>
-              <a:t>— Product Owner / Developer</a:t>
+              <a:t>— Product Owner</a:t>
             </a:r>
           </a:p>
         </p:txBody>
@@ -3716,7 +3716,7 @@
                 <a:latin typeface="Helvetica"/>
                 <a:ea typeface="Helvetica"/>
               </a:rPr>
-              <a:t>Kawaskar J</a:t>
+              <a:t>Library IT</a:t>
             </a:r>
           </a:p>
         </p:txBody>
@@ -3756,7 +3756,7 @@
                 <a:latin typeface="Helvetica"/>
                 <a:ea typeface="Helvetica"/>
               </a:rPr>
-              <a:t>— Scrum Master / Developer</a:t>
+              <a:t>— System Administration</a:t>
             </a:r>
           </a:p>
         </p:txBody>
@@ -3796,7 +3796,7 @@
                 <a:latin typeface="Menlo"/>
                 <a:ea typeface="Menlo"/>
               </a:rPr>
-              <a:t>Project seminar · September 2026</a:t>
+              <a:t>KCT Library · System documentation</a:t>
             </a:r>
           </a:p>
         </p:txBody>
@@ -6227,7 +6227,7 @@
                 <a:latin typeface="Helvetica"/>
                 <a:ea typeface="Helvetica"/>
               </a:rPr>
-              <a:t>KCT Library · 24CSI015 · Software Engineering with Agile Practices</a:t>
+              <a:t>KCT Library</a:t>
             </a:r>
           </a:p>
         </p:txBody>
@@ -7918,7 +7918,7 @@
                 <a:latin typeface="Helvetica"/>
                 <a:ea typeface="Helvetica"/>
               </a:rPr>
-              <a:t>KCT Library · 24CSI015 · Software Engineering with Agile Practices</a:t>
+              <a:t>KCT Library</a:t>
             </a:r>
           </a:p>
         </p:txBody>
@@ -9624,7 +9624,7 @@
                 <a:latin typeface="Helvetica"/>
                 <a:ea typeface="Helvetica"/>
               </a:rPr>
-              <a:t>KCT Library · 24CSI015 · Software Engineering with Agile Practices</a:t>
+              <a:t>KCT Library</a:t>
             </a:r>
           </a:p>
         </p:txBody>
@@ -10774,7 +10774,7 @@
                 <a:latin typeface="Helvetica"/>
                 <a:ea typeface="Helvetica"/>
               </a:rPr>
-              <a:t>KCT Library · 24CSI015 · Software Engineering with Agile Practices</a:t>
+              <a:t>KCT Library</a:t>
             </a:r>
           </a:p>
         </p:txBody>
@@ -11995,7 +11995,7 @@
                 <a:latin typeface="Helvetica"/>
                 <a:ea typeface="Helvetica"/>
               </a:rPr>
-              <a:t>KCT Library · 24CSI015 · Software Engineering with Agile Practices</a:t>
+              <a:t>KCT Library</a:t>
             </a:r>
           </a:p>
         </p:txBody>
@@ -12966,7 +12966,7 @@
                 <a:latin typeface="Helvetica"/>
                 <a:ea typeface="Helvetica"/>
               </a:rPr>
-              <a:t>KCT Library · 24CSI015 · Software Engineering with Agile Practices</a:t>
+              <a:t>KCT Library</a:t>
             </a:r>
           </a:p>
         </p:txBody>
@@ -13807,7 +13807,7 @@
                 <a:latin typeface="Helvetica"/>
                 <a:ea typeface="Helvetica"/>
               </a:rPr>
-              <a:t>KCT Library · 24CSI015 · Software Engineering with Agile Practices</a:t>
+              <a:t>KCT Library</a:t>
             </a:r>
           </a:p>
         </p:txBody>
@@ -14778,7 +14778,7 @@
                 <a:latin typeface="Helvetica"/>
                 <a:ea typeface="Helvetica"/>
               </a:rPr>
-              <a:t>KCT Library · 24CSI015 · Software Engineering with Agile Practices</a:t>
+              <a:t>KCT Library</a:t>
             </a:r>
           </a:p>
         </p:txBody>
@@ -16314,7 +16314,7 @@
                 <a:latin typeface="Helvetica"/>
                 <a:ea typeface="Helvetica"/>
               </a:rPr>
-              <a:t>KCT Library · 24CSI015 · Software Engineering with Agile Practices</a:t>
+              <a:t>KCT Library</a:t>
             </a:r>
           </a:p>
         </p:txBody>
@@ -17147,7 +17147,7 @@
                 <a:latin typeface="Helvetica"/>
                 <a:ea typeface="Helvetica"/>
               </a:rPr>
-              <a:t>KCT Library · 24CSI015 · Software Engineering with Agile Practices</a:t>
+              <a:t>KCT Library</a:t>
             </a:r>
           </a:p>
         </p:txBody>
@@ -17980,7 +17980,7 @@
                 <a:latin typeface="Helvetica"/>
                 <a:ea typeface="Helvetica"/>
               </a:rPr>
-              <a:t>KCT Library · 24CSI015 · Software Engineering with Agile Practices</a:t>
+              <a:t>KCT Library</a:t>
             </a:r>
           </a:p>
         </p:txBody>
@@ -19053,7 +19053,7 @@
                 <a:latin typeface="Helvetica"/>
                 <a:ea typeface="Helvetica"/>
               </a:rPr>
-              <a:t>KCT Library · 24CSI015 · Software Engineering with Agile Practices</a:t>
+              <a:t>KCT Library</a:t>
             </a:r>
           </a:p>
         </p:txBody>
@@ -20874,7 +20874,7 @@
                 <a:latin typeface="Helvetica"/>
                 <a:ea typeface="Helvetica"/>
               </a:rPr>
-              <a:t>KCT Library · 24CSI015 · Software Engineering with Agile Practices</a:t>
+              <a:t>KCT Library</a:t>
             </a:r>
           </a:p>
         </p:txBody>
@@ -23000,7 +23000,7 @@
                 <a:latin typeface="Helvetica"/>
                 <a:ea typeface="Helvetica"/>
               </a:rPr>
-              <a:t>KCT Library · 24CSI015 · Software Engineering with Agile Practices</a:t>
+              <a:t>KCT Library</a:t>
             </a:r>
           </a:p>
         </p:txBody>
@@ -23988,7 +23988,7 @@
                 <a:latin typeface="Helvetica"/>
                 <a:ea typeface="Helvetica"/>
               </a:rPr>
-              <a:t>KCT Library · 24CSI015 · Software Engineering with Agile Practices</a:t>
+              <a:t>KCT Library</a:t>
             </a:r>
           </a:p>
         </p:txBody>
